--- a/ゲーム科1年/00_前期/ゲームエンジンⅠ/00_Unity導入.pptx
+++ b/ゲーム科1年/00_前期/ゲームエンジンⅠ/00_Unity導入.pptx
@@ -267,7 +267,7 @@
           <a:p>
             <a:fld id="{E9CC885B-4903-4D54-9A93-00025F12DED9}" type="datetimeFigureOut">
               <a:rPr kumimoji="1" lang="ja-JP" altLang="en-US" smtClean="0"/>
-              <a:t>2024/9/18</a:t>
+              <a:t>2025/3/3</a:t>
             </a:fld>
             <a:endParaRPr kumimoji="1" lang="ja-JP" altLang="en-US"/>
           </a:p>
@@ -497,7 +497,7 @@
           <a:p>
             <a:fld id="{E9CC885B-4903-4D54-9A93-00025F12DED9}" type="datetimeFigureOut">
               <a:rPr kumimoji="1" lang="ja-JP" altLang="en-US" smtClean="0"/>
-              <a:t>2024/9/18</a:t>
+              <a:t>2025/3/3</a:t>
             </a:fld>
             <a:endParaRPr kumimoji="1" lang="ja-JP" altLang="en-US"/>
           </a:p>
@@ -737,7 +737,7 @@
           <a:p>
             <a:fld id="{E9CC885B-4903-4D54-9A93-00025F12DED9}" type="datetimeFigureOut">
               <a:rPr kumimoji="1" lang="ja-JP" altLang="en-US" smtClean="0"/>
-              <a:t>2024/9/18</a:t>
+              <a:t>2025/3/3</a:t>
             </a:fld>
             <a:endParaRPr kumimoji="1" lang="ja-JP" altLang="en-US"/>
           </a:p>
@@ -967,7 +967,7 @@
           <a:p>
             <a:fld id="{E9CC885B-4903-4D54-9A93-00025F12DED9}" type="datetimeFigureOut">
               <a:rPr kumimoji="1" lang="ja-JP" altLang="en-US" smtClean="0"/>
-              <a:t>2024/9/18</a:t>
+              <a:t>2025/3/3</a:t>
             </a:fld>
             <a:endParaRPr kumimoji="1" lang="ja-JP" altLang="en-US"/>
           </a:p>
@@ -1242,7 +1242,7 @@
           <a:p>
             <a:fld id="{E9CC885B-4903-4D54-9A93-00025F12DED9}" type="datetimeFigureOut">
               <a:rPr kumimoji="1" lang="ja-JP" altLang="en-US" smtClean="0"/>
-              <a:t>2024/9/18</a:t>
+              <a:t>2025/3/3</a:t>
             </a:fld>
             <a:endParaRPr kumimoji="1" lang="ja-JP" altLang="en-US"/>
           </a:p>
@@ -1571,7 +1571,7 @@
           <a:p>
             <a:fld id="{E9CC885B-4903-4D54-9A93-00025F12DED9}" type="datetimeFigureOut">
               <a:rPr kumimoji="1" lang="ja-JP" altLang="en-US" smtClean="0"/>
-              <a:t>2024/9/18</a:t>
+              <a:t>2025/3/3</a:t>
             </a:fld>
             <a:endParaRPr kumimoji="1" lang="ja-JP" altLang="en-US"/>
           </a:p>
@@ -2047,7 +2047,7 @@
           <a:p>
             <a:fld id="{E9CC885B-4903-4D54-9A93-00025F12DED9}" type="datetimeFigureOut">
               <a:rPr kumimoji="1" lang="ja-JP" altLang="en-US" smtClean="0"/>
-              <a:t>2024/9/18</a:t>
+              <a:t>2025/3/3</a:t>
             </a:fld>
             <a:endParaRPr kumimoji="1" lang="ja-JP" altLang="en-US"/>
           </a:p>
@@ -2188,7 +2188,7 @@
           <a:p>
             <a:fld id="{E9CC885B-4903-4D54-9A93-00025F12DED9}" type="datetimeFigureOut">
               <a:rPr kumimoji="1" lang="ja-JP" altLang="en-US" smtClean="0"/>
-              <a:t>2024/9/18</a:t>
+              <a:t>2025/3/3</a:t>
             </a:fld>
             <a:endParaRPr kumimoji="1" lang="ja-JP" altLang="en-US"/>
           </a:p>
@@ -2301,7 +2301,7 @@
           <a:p>
             <a:fld id="{E9CC885B-4903-4D54-9A93-00025F12DED9}" type="datetimeFigureOut">
               <a:rPr kumimoji="1" lang="ja-JP" altLang="en-US" smtClean="0"/>
-              <a:t>2024/9/18</a:t>
+              <a:t>2025/3/3</a:t>
             </a:fld>
             <a:endParaRPr kumimoji="1" lang="ja-JP" altLang="en-US"/>
           </a:p>
@@ -2644,7 +2644,7 @@
           <a:p>
             <a:fld id="{E9CC885B-4903-4D54-9A93-00025F12DED9}" type="datetimeFigureOut">
               <a:rPr kumimoji="1" lang="ja-JP" altLang="en-US" smtClean="0"/>
-              <a:t>2024/9/18</a:t>
+              <a:t>2025/3/3</a:t>
             </a:fld>
             <a:endParaRPr kumimoji="1" lang="ja-JP" altLang="en-US"/>
           </a:p>
@@ -2932,7 +2932,7 @@
           <a:p>
             <a:fld id="{E9CC885B-4903-4D54-9A93-00025F12DED9}" type="datetimeFigureOut">
               <a:rPr kumimoji="1" lang="ja-JP" altLang="en-US" smtClean="0"/>
-              <a:t>2024/9/18</a:t>
+              <a:t>2025/3/3</a:t>
             </a:fld>
             <a:endParaRPr kumimoji="1" lang="ja-JP" altLang="en-US"/>
           </a:p>
@@ -3205,7 +3205,7 @@
           <a:p>
             <a:fld id="{E9CC885B-4903-4D54-9A93-00025F12DED9}" type="datetimeFigureOut">
               <a:rPr kumimoji="1" lang="ja-JP" altLang="en-US" smtClean="0"/>
-              <a:t>2024/9/18</a:t>
+              <a:t>2025/3/3</a:t>
             </a:fld>
             <a:endParaRPr kumimoji="1" lang="ja-JP" altLang="en-US"/>
           </a:p>
@@ -5117,69 +5117,6 @@
           </a:prstGeom>
         </p:spPr>
       </p:pic>
-      <p:sp>
-        <p:nvSpPr>
-          <p:cNvPr id="8" name="テキスト ボックス 7">
-            <a:extLst>
-              <a:ext uri="{FF2B5EF4-FFF2-40B4-BE49-F238E27FC236}">
-                <a16:creationId xmlns:a16="http://schemas.microsoft.com/office/drawing/2014/main" id="{67ACF4BC-56CD-4BE4-B7F4-F2E429776026}"/>
-              </a:ext>
-            </a:extLst>
-          </p:cNvPr>
-          <p:cNvSpPr txBox="1"/>
-          <p:nvPr/>
-        </p:nvSpPr>
-        <p:spPr>
-          <a:xfrm>
-            <a:off x="567542" y="5993391"/>
-            <a:ext cx="9339416" cy="830997"/>
-          </a:xfrm>
-          <a:prstGeom prst="rect">
-            <a:avLst/>
-          </a:prstGeom>
-          <a:noFill/>
-        </p:spPr>
-        <p:txBody>
-          <a:bodyPr wrap="none" rtlCol="0">
-            <a:spAutoFit/>
-          </a:bodyPr>
-          <a:lstStyle/>
-          <a:p>
-            <a:r>
-              <a:rPr lang="en-US" altLang="ja-JP" sz="2400" dirty="0"/>
-              <a:t>※</a:t>
-            </a:r>
-            <a:r>
-              <a:rPr lang="ja-JP" altLang="en-US" sz="2400" dirty="0"/>
-              <a:t>基本的には３</a:t>
-            </a:r>
-            <a:r>
-              <a:rPr lang="en-US" altLang="ja-JP" sz="2400" dirty="0"/>
-              <a:t>D</a:t>
-            </a:r>
-            <a:r>
-              <a:rPr lang="ja-JP" altLang="en-US" sz="2400" dirty="0"/>
-              <a:t>からで大丈夫です。</a:t>
-            </a:r>
-            <a:endParaRPr lang="en-US" altLang="ja-JP" sz="2400" dirty="0"/>
-          </a:p>
-          <a:p>
-            <a:r>
-              <a:rPr lang="ja-JP" altLang="en-US" sz="2400" dirty="0"/>
-              <a:t>　あくまでテンプレートなので、ここから２</a:t>
-            </a:r>
-            <a:r>
-              <a:rPr lang="en-US" altLang="ja-JP" sz="2400" dirty="0"/>
-              <a:t>D</a:t>
-            </a:r>
-            <a:r>
-              <a:rPr lang="ja-JP" altLang="en-US" sz="2400" dirty="0"/>
-              <a:t>ゲームも作れます。</a:t>
-            </a:r>
-            <a:endParaRPr lang="en-US" altLang="ja-JP" sz="2400" dirty="0"/>
-          </a:p>
-        </p:txBody>
-      </p:sp>
     </p:spTree>
     <p:extLst>
       <p:ext uri="{BB962C8B-B14F-4D97-AF65-F5344CB8AC3E}">
